--- a/cftc_positioning_analysis/WTI_Brent_positioning_structure_trading.pptx
+++ b/cftc_positioning_analysis/WTI_Brent_positioning_structure_trading.pptx
@@ -16,9 +16,148 @@
     <p:sldId id="264" r:id="rId10"/>
     <p:sldId id="265" r:id="rId11"/>
   </p:sldIdLst>
-  <p:sldSz cx="12192000" cy="6858000" type="screen16x9"/>
+  <p:sldSz cx="12192000" cy="6858000"/>
   <p:notesSz cx="6858000" cy="9144000"/>
+  <p:defaultTextStyle>
+    <a:defPPr>
+      <a:defRPr lang="en-US"/>
+    </a:defPPr>
+    <a:lvl1pPr marL="0" algn="l" defTabSz="914400" rtl="0" eaLnBrk="1" latinLnBrk="0" hangingPunct="1">
+      <a:defRPr sz="1800" kern="1200">
+        <a:solidFill>
+          <a:schemeClr val="tx1"/>
+        </a:solidFill>
+        <a:latin typeface="+mn-lt"/>
+        <a:ea typeface="+mn-ea"/>
+        <a:cs typeface="+mn-cs"/>
+      </a:defRPr>
+    </a:lvl1pPr>
+    <a:lvl2pPr marL="457200" algn="l" defTabSz="914400" rtl="0" eaLnBrk="1" latinLnBrk="0" hangingPunct="1">
+      <a:defRPr sz="1800" kern="1200">
+        <a:solidFill>
+          <a:schemeClr val="tx1"/>
+        </a:solidFill>
+        <a:latin typeface="+mn-lt"/>
+        <a:ea typeface="+mn-ea"/>
+        <a:cs typeface="+mn-cs"/>
+      </a:defRPr>
+    </a:lvl2pPr>
+    <a:lvl3pPr marL="914400" algn="l" defTabSz="914400" rtl="0" eaLnBrk="1" latinLnBrk="0" hangingPunct="1">
+      <a:defRPr sz="1800" kern="1200">
+        <a:solidFill>
+          <a:schemeClr val="tx1"/>
+        </a:solidFill>
+        <a:latin typeface="+mn-lt"/>
+        <a:ea typeface="+mn-ea"/>
+        <a:cs typeface="+mn-cs"/>
+      </a:defRPr>
+    </a:lvl3pPr>
+    <a:lvl4pPr marL="1371600" algn="l" defTabSz="914400" rtl="0" eaLnBrk="1" latinLnBrk="0" hangingPunct="1">
+      <a:defRPr sz="1800" kern="1200">
+        <a:solidFill>
+          <a:schemeClr val="tx1"/>
+        </a:solidFill>
+        <a:latin typeface="+mn-lt"/>
+        <a:ea typeface="+mn-ea"/>
+        <a:cs typeface="+mn-cs"/>
+      </a:defRPr>
+    </a:lvl4pPr>
+    <a:lvl5pPr marL="1828800" algn="l" defTabSz="914400" rtl="0" eaLnBrk="1" latinLnBrk="0" hangingPunct="1">
+      <a:defRPr sz="1800" kern="1200">
+        <a:solidFill>
+          <a:schemeClr val="tx1"/>
+        </a:solidFill>
+        <a:latin typeface="+mn-lt"/>
+        <a:ea typeface="+mn-ea"/>
+        <a:cs typeface="+mn-cs"/>
+      </a:defRPr>
+    </a:lvl5pPr>
+    <a:lvl6pPr marL="2286000" algn="l" defTabSz="914400" rtl="0" eaLnBrk="1" latinLnBrk="0" hangingPunct="1">
+      <a:defRPr sz="1800" kern="1200">
+        <a:solidFill>
+          <a:schemeClr val="tx1"/>
+        </a:solidFill>
+        <a:latin typeface="+mn-lt"/>
+        <a:ea typeface="+mn-ea"/>
+        <a:cs typeface="+mn-cs"/>
+      </a:defRPr>
+    </a:lvl6pPr>
+    <a:lvl7pPr marL="2743200" algn="l" defTabSz="914400" rtl="0" eaLnBrk="1" latinLnBrk="0" hangingPunct="1">
+      <a:defRPr sz="1800" kern="1200">
+        <a:solidFill>
+          <a:schemeClr val="tx1"/>
+        </a:solidFill>
+        <a:latin typeface="+mn-lt"/>
+        <a:ea typeface="+mn-ea"/>
+        <a:cs typeface="+mn-cs"/>
+      </a:defRPr>
+    </a:lvl7pPr>
+    <a:lvl8pPr marL="3200400" algn="l" defTabSz="914400" rtl="0" eaLnBrk="1" latinLnBrk="0" hangingPunct="1">
+      <a:defRPr sz="1800" kern="1200">
+        <a:solidFill>
+          <a:schemeClr val="tx1"/>
+        </a:solidFill>
+        <a:latin typeface="+mn-lt"/>
+        <a:ea typeface="+mn-ea"/>
+        <a:cs typeface="+mn-cs"/>
+      </a:defRPr>
+    </a:lvl8pPr>
+    <a:lvl9pPr marL="3657600" algn="l" defTabSz="914400" rtl="0" eaLnBrk="1" latinLnBrk="0" hangingPunct="1">
+      <a:defRPr sz="1800" kern="1200">
+        <a:solidFill>
+          <a:schemeClr val="tx1"/>
+        </a:solidFill>
+        <a:latin typeface="+mn-lt"/>
+        <a:ea typeface="+mn-ea"/>
+        <a:cs typeface="+mn-cs"/>
+      </a:defRPr>
+    </a:lvl9pPr>
+  </p:defaultTextStyle>
 </p:presentation>
+</file>
+
+<file path=ppt/changesInfos/changesInfo1.xml><?xml version="1.0" encoding="utf-8"?>
+<pc:chgInfo xmlns:a="http://schemas.openxmlformats.org/drawingml/2006/main" xmlns:r="http://schemas.openxmlformats.org/officeDocument/2006/relationships" xmlns:ac="http://schemas.microsoft.com/office/drawing/2013/main/command" xmlns:pc="http://schemas.microsoft.com/office/powerpoint/2013/main/command">
+  <pc:docChgLst>
+    <pc:chgData name="Aayush Jhawar" userId="63043c1f-65cf-4dc0-add7-e2f496264507" providerId="ADAL" clId="{AFD85A7A-4199-4CC0-BD34-457A87DFFE3B}"/>
+    <pc:docChg chg="modSld">
+      <pc:chgData name="Aayush Jhawar" userId="63043c1f-65cf-4dc0-add7-e2f496264507" providerId="ADAL" clId="{AFD85A7A-4199-4CC0-BD34-457A87DFFE3B}" dt="2026-07-01T07:44:24.561" v="3" actId="1076"/>
+      <pc:docMkLst>
+        <pc:docMk/>
+      </pc:docMkLst>
+      <pc:sldChg chg="modSp mod">
+        <pc:chgData name="Aayush Jhawar" userId="63043c1f-65cf-4dc0-add7-e2f496264507" providerId="ADAL" clId="{AFD85A7A-4199-4CC0-BD34-457A87DFFE3B}" dt="2026-07-01T07:44:24.561" v="3" actId="1076"/>
+        <pc:sldMkLst>
+          <pc:docMk/>
+          <pc:sldMk cId="0" sldId="261"/>
+        </pc:sldMkLst>
+        <pc:picChg chg="mod">
+          <ac:chgData name="Aayush Jhawar" userId="63043c1f-65cf-4dc0-add7-e2f496264507" providerId="ADAL" clId="{AFD85A7A-4199-4CC0-BD34-457A87DFFE3B}" dt="2026-07-01T07:44:24.561" v="3" actId="1076"/>
+          <ac:picMkLst>
+            <pc:docMk/>
+            <pc:sldMk cId="0" sldId="261"/>
+            <ac:picMk id="27" creationId="{00000000-0000-0000-0000-000000000000}"/>
+          </ac:picMkLst>
+        </pc:picChg>
+      </pc:sldChg>
+      <pc:sldChg chg="modSp mod">
+        <pc:chgData name="Aayush Jhawar" userId="63043c1f-65cf-4dc0-add7-e2f496264507" providerId="ADAL" clId="{AFD85A7A-4199-4CC0-BD34-457A87DFFE3B}" dt="2026-07-01T07:43:39.775" v="0" actId="20577"/>
+        <pc:sldMkLst>
+          <pc:docMk/>
+          <pc:sldMk cId="0" sldId="264"/>
+        </pc:sldMkLst>
+        <pc:spChg chg="mod">
+          <ac:chgData name="Aayush Jhawar" userId="63043c1f-65cf-4dc0-add7-e2f496264507" providerId="ADAL" clId="{AFD85A7A-4199-4CC0-BD34-457A87DFFE3B}" dt="2026-07-01T07:43:39.775" v="0" actId="20577"/>
+          <ac:spMkLst>
+            <pc:docMk/>
+            <pc:sldMk cId="0" sldId="264"/>
+            <ac:spMk id="37" creationId="{00000000-0000-0000-0000-000000000000}"/>
+          </ac:spMkLst>
+        </pc:spChg>
+      </pc:sldChg>
+    </pc:docChg>
+  </pc:docChgLst>
+</pc:chgInfo>
 </file>
 
 <file path=ppt/slideLayouts/slideLayout1.xml><?xml version="1.0" encoding="utf-8"?>
@@ -296,7 +435,7 @@
           </a:bodyPr>
           <a:lstStyle/>
           <a:p>
-            <a:pPr algn="l" indent="-210000" marL="255000">
+            <a:pPr marL="255000" indent="-210000" algn="l">
               <a:spcAft>
                 <a:spcPts val="440"/>
               </a:spcAft>
@@ -314,7 +453,7 @@
             </a:r>
           </a:p>
           <a:p>
-            <a:pPr algn="l" indent="-210000" marL="255000">
+            <a:pPr marL="255000" indent="-210000" algn="l">
               <a:spcAft>
                 <a:spcPts val="440"/>
               </a:spcAft>
@@ -332,7 +471,7 @@
             </a:r>
           </a:p>
           <a:p>
-            <a:pPr algn="l" indent="-210000" marL="255000">
+            <a:pPr marL="255000" indent="-210000" algn="l">
               <a:spcAft>
                 <a:spcPts val="440"/>
               </a:spcAft>
@@ -350,7 +489,7 @@
             </a:r>
           </a:p>
           <a:p>
-            <a:pPr algn="l" indent="-210000" marL="255000">
+            <a:pPr marL="255000" indent="-210000" algn="l">
               <a:spcAft>
                 <a:spcPts val="440"/>
               </a:spcAft>
@@ -525,7 +664,7 @@
             </a:r>
           </a:p>
           <a:p>
-            <a:pPr algn="l" indent="-210000" marL="255000">
+            <a:pPr marL="255000" indent="-210000" algn="l">
               <a:spcAft>
                 <a:spcPts val="440"/>
               </a:spcAft>
@@ -552,7 +691,7 @@
             </a:r>
           </a:p>
           <a:p>
-            <a:pPr algn="l" indent="-210000" marL="255000">
+            <a:pPr marL="255000" indent="-210000" algn="l">
               <a:spcAft>
                 <a:spcPts val="440"/>
               </a:spcAft>
@@ -579,7 +718,7 @@
             </a:r>
           </a:p>
           <a:p>
-            <a:pPr algn="l" indent="-210000" marL="255000">
+            <a:pPr marL="255000" indent="-210000" algn="l">
               <a:spcAft>
                 <a:spcPts val="440"/>
               </a:spcAft>
@@ -606,7 +745,7 @@
             </a:r>
           </a:p>
           <a:p>
-            <a:pPr algn="l" indent="-210000" marL="255000">
+            <a:pPr marL="255000" indent="-210000" algn="l">
               <a:spcAft>
                 <a:spcPts val="440"/>
               </a:spcAft>
@@ -633,7 +772,7 @@
             </a:r>
           </a:p>
           <a:p>
-            <a:pPr algn="l" indent="-210000" marL="255000">
+            <a:pPr marL="255000" indent="-210000" algn="l">
               <a:spcAft>
                 <a:spcPts val="440"/>
               </a:spcAft>
@@ -660,7 +799,7 @@
             </a:r>
           </a:p>
           <a:p>
-            <a:pPr algn="l" indent="-210000" marL="255000">
+            <a:pPr marL="255000" indent="-210000" algn="l">
               <a:spcAft>
                 <a:spcPts val="440"/>
               </a:spcAft>
@@ -727,7 +866,7 @@
             </a:r>
           </a:p>
           <a:p>
-            <a:pPr algn="l" indent="-210000" marL="255000">
+            <a:pPr marL="255000" indent="-210000" algn="l">
               <a:spcAft>
                 <a:spcPts val="440"/>
               </a:spcAft>
@@ -745,7 +884,7 @@
             </a:r>
           </a:p>
           <a:p>
-            <a:pPr algn="l" indent="-210000" marL="255000">
+            <a:pPr marL="255000" indent="-210000" algn="l">
               <a:spcAft>
                 <a:spcPts val="440"/>
               </a:spcAft>
@@ -763,7 +902,7 @@
             </a:r>
           </a:p>
           <a:p>
-            <a:pPr algn="l" indent="-210000" marL="255000">
+            <a:pPr marL="255000" indent="-210000" algn="l">
               <a:spcAft>
                 <a:spcPts val="440"/>
               </a:spcAft>
@@ -781,7 +920,7 @@
             </a:r>
           </a:p>
           <a:p>
-            <a:pPr algn="l" indent="-210000" marL="255000">
+            <a:pPr marL="255000" indent="-210000" algn="l">
               <a:spcAft>
                 <a:spcPts val="440"/>
               </a:spcAft>
@@ -960,7 +1099,7 @@
           </a:bodyPr>
           <a:lstStyle/>
           <a:p>
-            <a:pPr algn="l" indent="-210000" marL="255000">
+            <a:pPr marL="255000" indent="-210000" algn="l">
               <a:spcAft>
                 <a:spcPts val="440"/>
               </a:spcAft>
@@ -987,7 +1126,7 @@
             </a:r>
           </a:p>
           <a:p>
-            <a:pPr algn="l" indent="-210000" marL="255000">
+            <a:pPr marL="255000" indent="-210000" algn="l">
               <a:spcAft>
                 <a:spcPts val="440"/>
               </a:spcAft>
@@ -1014,7 +1153,7 @@
             </a:r>
           </a:p>
           <a:p>
-            <a:pPr algn="l" indent="-210000" marL="255000">
+            <a:pPr marL="255000" indent="-210000" algn="l">
               <a:spcAft>
                 <a:spcPts val="440"/>
               </a:spcAft>
@@ -1041,7 +1180,7 @@
             </a:r>
           </a:p>
           <a:p>
-            <a:pPr algn="l" indent="-210000" marL="255000">
+            <a:pPr marL="255000" indent="-210000" algn="l">
               <a:spcAft>
                 <a:spcPts val="440"/>
               </a:spcAft>
@@ -1068,7 +1207,7 @@
             </a:r>
           </a:p>
           <a:p>
-            <a:pPr algn="l" indent="-210000" marL="255000">
+            <a:pPr marL="255000" indent="-210000" algn="l">
               <a:spcAft>
                 <a:spcPts val="440"/>
               </a:spcAft>
@@ -1234,7 +1373,7 @@
             </a:r>
           </a:p>
           <a:p>
-            <a:pPr algn="l" indent="-210000" marL="255000">
+            <a:pPr marL="255000" indent="-210000" algn="l">
               <a:spcAft>
                 <a:spcPts val="440"/>
               </a:spcAft>
@@ -1252,7 +1391,7 @@
             </a:r>
           </a:p>
           <a:p>
-            <a:pPr algn="l" indent="-210000" marL="255000">
+            <a:pPr marL="255000" indent="-210000" algn="l">
               <a:spcAft>
                 <a:spcPts val="440"/>
               </a:spcAft>
@@ -1270,7 +1409,7 @@
             </a:r>
           </a:p>
           <a:p>
-            <a:pPr algn="l" indent="-210000" marL="255000">
+            <a:pPr marL="255000" indent="-210000" algn="l">
               <a:spcAft>
                 <a:spcPts val="440"/>
               </a:spcAft>
@@ -1427,7 +1566,7 @@
             </a:r>
           </a:p>
           <a:p>
-            <a:pPr algn="l" indent="-210000" marL="255000">
+            <a:pPr marL="255000" indent="-210000" algn="l">
               <a:spcAft>
                 <a:spcPts val="440"/>
               </a:spcAft>
@@ -1445,7 +1584,7 @@
             </a:r>
           </a:p>
           <a:p>
-            <a:pPr algn="l" indent="-210000" marL="255000">
+            <a:pPr marL="255000" indent="-210000" algn="l">
               <a:spcAft>
                 <a:spcPts val="440"/>
               </a:spcAft>
@@ -1463,7 +1602,7 @@
             </a:r>
           </a:p>
           <a:p>
-            <a:pPr algn="l" indent="-210000" marL="255000">
+            <a:pPr marL="255000" indent="-210000" algn="l">
               <a:spcAft>
                 <a:spcPts val="440"/>
               </a:spcAft>
@@ -1620,7 +1759,7 @@
             </a:r>
           </a:p>
           <a:p>
-            <a:pPr algn="l" indent="-210000" marL="255000">
+            <a:pPr marL="255000" indent="-210000" algn="l">
               <a:spcAft>
                 <a:spcPts val="440"/>
               </a:spcAft>
@@ -1638,7 +1777,7 @@
             </a:r>
           </a:p>
           <a:p>
-            <a:pPr algn="l" indent="-210000" marL="255000">
+            <a:pPr marL="255000" indent="-210000" algn="l">
               <a:spcAft>
                 <a:spcPts val="440"/>
               </a:spcAft>
@@ -1656,7 +1795,7 @@
             </a:r>
           </a:p>
           <a:p>
-            <a:pPr algn="l" indent="-210000" marL="255000">
+            <a:pPr marL="255000" indent="-210000" algn="l">
               <a:spcAft>
                 <a:spcPts val="440"/>
               </a:spcAft>
@@ -1766,7 +1905,7 @@
         </p:blipFill>
         <p:spPr>
           <a:xfrm>
-            <a:off x="274320" y="1801510"/>
+            <a:off x="265747" y="1097280"/>
             <a:ext cx="7040880" cy="3575020"/>
           </a:xfrm>
           <a:prstGeom prst="rect">
@@ -1813,7 +1952,7 @@
             </a:r>
           </a:p>
           <a:p>
-            <a:pPr algn="l" indent="-210000" marL="255000">
+            <a:pPr marL="255000" indent="-210000" algn="l">
               <a:spcAft>
                 <a:spcPts val="440"/>
               </a:spcAft>
@@ -1831,7 +1970,7 @@
             </a:r>
           </a:p>
           <a:p>
-            <a:pPr algn="l" indent="-210000" marL="255000">
+            <a:pPr marL="255000" indent="-210000" algn="l">
               <a:spcAft>
                 <a:spcPts val="440"/>
               </a:spcAft>
@@ -1849,7 +1988,7 @@
             </a:r>
           </a:p>
           <a:p>
-            <a:pPr algn="l" indent="-210000" marL="255000">
+            <a:pPr marL="255000" indent="-210000" algn="l">
               <a:spcAft>
                 <a:spcPts val="440"/>
               </a:spcAft>
@@ -1965,7 +2104,7 @@
           </a:bodyPr>
           <a:lstStyle/>
           <a:p>
-            <a:pPr algn="l" indent="-210000" marL="255000">
+            <a:pPr marL="255000" indent="-210000" algn="l">
               <a:spcAft>
                 <a:spcPts val="440"/>
               </a:spcAft>
@@ -1983,7 +2122,7 @@
             </a:r>
           </a:p>
           <a:p>
-            <a:pPr algn="l" indent="-210000" marL="255000">
+            <a:pPr marL="255000" indent="-210000" algn="l">
               <a:spcAft>
                 <a:spcPts val="440"/>
               </a:spcAft>
@@ -2001,7 +2140,7 @@
             </a:r>
           </a:p>
           <a:p>
-            <a:pPr algn="l" indent="-210000" marL="255000">
+            <a:pPr marL="255000" indent="-210000" algn="l">
               <a:spcAft>
                 <a:spcPts val="440"/>
               </a:spcAft>
@@ -2184,7 +2323,7 @@
             </a:r>
           </a:p>
           <a:p>
-            <a:pPr algn="l" indent="-210000" marL="255000">
+            <a:pPr marL="255000" indent="-210000" algn="l">
               <a:spcAft>
                 <a:spcPts val="200"/>
               </a:spcAft>
@@ -2211,7 +2350,7 @@
             </a:r>
           </a:p>
           <a:p>
-            <a:pPr algn="l" indent="-210000" marL="255000">
+            <a:pPr marL="255000" indent="-210000" algn="l">
               <a:spcAft>
                 <a:spcPts val="200"/>
               </a:spcAft>
@@ -2238,7 +2377,7 @@
             </a:r>
           </a:p>
           <a:p>
-            <a:pPr algn="l" indent="-210000" marL="255000">
+            <a:pPr marL="255000" indent="-210000" algn="l">
               <a:spcAft>
                 <a:spcPts val="200"/>
               </a:spcAft>
@@ -2252,8 +2391,17 @@
                 </a:solidFill>
                 <a:latin typeface="Calibri"/>
               </a:rPr>
-              <a:t>Choppy market + Light position</a:t>
-            </a:r>
+              <a:t>Choppy market + Light position  =  CL +1.6%  (52% hit)</a:t>
+            </a:r>
+          </a:p>
+          <a:p>
+            <a:pPr marL="255000" indent="-210000" algn="l">
+              <a:spcAft>
+                <a:spcPts val="240"/>
+              </a:spcAft>
+              <a:buFont typeface="Arial"/>
+              <a:buChar char="•"/>
+            </a:pPr>
             <a:r>
               <a:rPr lang="en-US" sz="1250" b="1" dirty="0">
                 <a:solidFill>
@@ -2261,14 +2409,40 @@
                 </a:solidFill>
                 <a:latin typeface="Calibri"/>
               </a:rPr>
-              <a:t>  =  CL +1.6%  (52% hit)</a:t>
-            </a:r>
-          </a:p>
-          <a:p>
-            <a:pPr algn="l" indent="-210000" marL="255000">
+              <a:t>Choppy market + Crowded long</a:t>
+            </a:r>
+            <a:r>
+              <a:rPr lang="en-US" sz="1250" b="1" dirty="0">
+                <a:solidFill>
+                  <a:srgbClr val="C0392B"/>
+                </a:solidFill>
+                <a:latin typeface="Calibri"/>
+              </a:rPr>
+              <a:t>  =  CL +2.5% but 47% hit (coin-flip)</a:t>
+            </a:r>
+          </a:p>
+          <a:p>
+            <a:pPr algn="l">
               <a:spcAft>
                 <a:spcPts val="240"/>
               </a:spcAft>
+              <a:buNone/>
+            </a:pPr>
+            <a:r>
+              <a:rPr lang="en-US" sz="1300" b="1" dirty="0">
+                <a:solidFill>
+                  <a:srgbClr val="16324F"/>
+                </a:solidFill>
+                <a:latin typeface="Calibri"/>
+              </a:rPr>
+              <a:t>STALENESS (how long the bet has lasted)</a:t>
+            </a:r>
+          </a:p>
+          <a:p>
+            <a:pPr marL="255000" indent="-210000" algn="l">
+              <a:spcAft>
+                <a:spcPts val="200"/>
+              </a:spcAft>
               <a:buFont typeface="Arial"/>
               <a:buChar char="•"/>
             </a:pPr>
@@ -2279,91 +2453,47 @@
                 </a:solidFill>
                 <a:latin typeface="Calibri"/>
               </a:rPr>
-              <a:t>Choppy market + Crowded long</a:t>
+              <a:t>Fresh crowded long</a:t>
             </a:r>
             <a:r>
               <a:rPr lang="en-US" sz="1250" b="1" dirty="0">
                 <a:solidFill>
+                  <a:srgbClr val="1E8B54"/>
+                </a:solidFill>
+                <a:latin typeface="Calibri"/>
+              </a:rPr>
+              <a:t>  =  CL +9.0%  (80% hit, ride it)</a:t>
+            </a:r>
+          </a:p>
+          <a:p>
+            <a:pPr marL="255000" indent="-210000" algn="l">
+              <a:spcAft>
+                <a:spcPts val="200"/>
+              </a:spcAft>
+              <a:buFont typeface="Arial"/>
+              <a:buChar char="•"/>
+            </a:pPr>
+            <a:r>
+              <a:rPr lang="en-US" sz="1250" b="1" dirty="0">
+                <a:solidFill>
+                  <a:srgbClr val="1A1A1A"/>
+                </a:solidFill>
+                <a:latin typeface="Calibri"/>
+              </a:rPr>
+              <a:t>Crowded long, gone STALE</a:t>
+            </a:r>
+            <a:r>
+              <a:rPr lang="en-US" sz="1250" b="1" dirty="0">
+                <a:solidFill>
                   <a:srgbClr val="C0392B"/>
                 </a:solidFill>
                 <a:latin typeface="Calibri"/>
               </a:rPr>
-              <a:t>  =  CL +2.5% but 47% hit (coin-flip)</a:t>
-            </a:r>
-          </a:p>
-          <a:p>
-            <a:pPr algn="l">
-              <a:spcAft>
-                <a:spcPts val="240"/>
-              </a:spcAft>
-              <a:buNone/>
-            </a:pPr>
-            <a:r>
-              <a:rPr lang="en-US" sz="1300" b="1" dirty="0">
-                <a:solidFill>
-                  <a:srgbClr val="16324F"/>
-                </a:solidFill>
-                <a:latin typeface="Calibri"/>
-              </a:rPr>
-              <a:t>STALENESS (how long the bet has lasted)</a:t>
-            </a:r>
-          </a:p>
-          <a:p>
-            <a:pPr algn="l" indent="-210000" marL="255000">
-              <a:spcAft>
-                <a:spcPts val="200"/>
-              </a:spcAft>
-              <a:buFont typeface="Arial"/>
-              <a:buChar char="•"/>
-            </a:pPr>
-            <a:r>
-              <a:rPr lang="en-US" sz="1250" b="1" dirty="0">
-                <a:solidFill>
-                  <a:srgbClr val="1A1A1A"/>
-                </a:solidFill>
-                <a:latin typeface="Calibri"/>
-              </a:rPr>
-              <a:t>Fresh crowded long</a:t>
-            </a:r>
-            <a:r>
-              <a:rPr lang="en-US" sz="1250" b="1" dirty="0">
-                <a:solidFill>
-                  <a:srgbClr val="1E8B54"/>
-                </a:solidFill>
-                <a:latin typeface="Calibri"/>
-              </a:rPr>
-              <a:t>  =  CL +9.0%  (80% hit, ride it)</a:t>
-            </a:r>
-          </a:p>
-          <a:p>
-            <a:pPr algn="l" indent="-210000" marL="255000">
-              <a:spcAft>
-                <a:spcPts val="200"/>
-              </a:spcAft>
-              <a:buFont typeface="Arial"/>
-              <a:buChar char="•"/>
-            </a:pPr>
-            <a:r>
-              <a:rPr lang="en-US" sz="1250" b="1" dirty="0">
-                <a:solidFill>
-                  <a:srgbClr val="1A1A1A"/>
-                </a:solidFill>
-                <a:latin typeface="Calibri"/>
-              </a:rPr>
-              <a:t>Crowded long, gone STALE</a:t>
-            </a:r>
-            <a:r>
-              <a:rPr lang="en-US" sz="1250" b="1" dirty="0">
-                <a:solidFill>
-                  <a:srgbClr val="C0392B"/>
-                </a:solidFill>
-                <a:latin typeface="Calibri"/>
-              </a:rPr>
               <a:t>  =  CL ~0%  (33% hit, step aside)</a:t>
             </a:r>
           </a:p>
           <a:p>
-            <a:pPr algn="l" indent="-210000" marL="255000">
+            <a:pPr marL="255000" indent="-210000" algn="l">
               <a:spcAft>
                 <a:spcPts val="200"/>
               </a:spcAft>
@@ -2583,7 +2713,7 @@
             </a:r>
           </a:p>
           <a:p>
-            <a:pPr algn="l" indent="-210000" marL="255000">
+            <a:pPr marL="255000" indent="-210000" algn="l">
               <a:spcAft>
                 <a:spcPts val="170"/>
               </a:spcAft>
@@ -2610,7 +2740,7 @@
             </a:r>
           </a:p>
           <a:p>
-            <a:pPr algn="l" indent="-210000" marL="255000">
+            <a:pPr marL="255000" indent="-210000" algn="l">
               <a:spcAft>
                 <a:spcPts val="170"/>
               </a:spcAft>
@@ -2637,7 +2767,7 @@
             </a:r>
           </a:p>
           <a:p>
-            <a:pPr algn="l" indent="-210000" marL="255000">
+            <a:pPr marL="255000" indent="-210000" algn="l">
               <a:spcAft>
                 <a:spcPts val="170"/>
               </a:spcAft>
@@ -2664,7 +2794,7 @@
             </a:r>
           </a:p>
           <a:p>
-            <a:pPr algn="l" indent="-210000" marL="255000">
+            <a:pPr marL="255000" indent="-210000" algn="l">
               <a:spcAft>
                 <a:spcPts val="280"/>
               </a:spcAft>
@@ -2704,11 +2834,11 @@
                 </a:solidFill>
                 <a:latin typeface="Calibri"/>
               </a:rPr>
-              <a:t>EXPIRY WINDOW  (last ~7 days, WTI/NYMEX rule)</a:t>
-            </a:r>
-          </a:p>
-          <a:p>
-            <a:pPr algn="l" indent="-210000" marL="255000">
+              <a:t>EXPIRY WINDOW  (last 7 days, WTI/NYMEX rule)</a:t>
+            </a:r>
+          </a:p>
+          <a:p>
+            <a:pPr marL="255000" indent="-210000" algn="l">
               <a:spcAft>
                 <a:spcPts val="170"/>
               </a:spcAft>
@@ -2735,7 +2865,7 @@
             </a:r>
           </a:p>
           <a:p>
-            <a:pPr algn="l" indent="-210000" marL="255000">
+            <a:pPr marL="255000" indent="-210000" algn="l">
               <a:spcAft>
                 <a:spcPts val="170"/>
               </a:spcAft>
@@ -2762,7 +2892,7 @@
             </a:r>
           </a:p>
           <a:p>
-            <a:pPr algn="l" indent="-210000" marL="255000">
+            <a:pPr marL="255000" indent="-210000" algn="l">
               <a:spcAft>
                 <a:spcPts val="170"/>
               </a:spcAft>
@@ -3043,5 +3173,7 @@
       </a:bgFillStyleLst>
     </a:fmtScheme>
   </a:themeElements>
+  <a:objectDefaults/>
+  <a:extraClrSchemeLst/>
 </a:theme>
 </file>